--- a/coding_quantitative/fa26-prina-econ3291-excel_r/FA26-Prina-ECON3291-Excel-or-R-Guide.pptx
+++ b/coding_quantitative/fa26-prina-econ3291-excel_r/FA26-Prina-ECON3291-Excel-or-R-Guide.pptx
@@ -26826,7 +26826,7 @@
                   <a:srgbClr val="212121"/>
                 </a:solidFill>
               </a:rPr>
-              <a:t>Slides, notebooks, and dataset: [ADD COURSE MATERIALS LINK]</a:t>
+              <a:t>All materials: https://github.com/NULabNortheastern/digitalassignmentshowcase/tree/main/coding_quantitative/fa26-prina-econ3291-excel_r</a:t>
             </a:r>
           </a:p>
           <a:p>

--- a/coding_quantitative/fa26-prina-econ3291-excel_r/FA26-Prina-ECON3291-Excel-or-R-Guide.pptx
+++ b/coding_quantitative/fa26-prina-econ3291-excel_r/FA26-Prina-ECON3291-Excel-or-R-Guide.pptx
@@ -15522,7 +15522,7 @@
                   <a:srgbClr val="37474F"/>
                 </a:solidFill>
               </a:rPr>
-              <a:t>Taught by the DITI Research and Teaching Fellows</a:t>
+              <a:t>Taught by Sean Rogers  ·  DITI Research and Teaching Fellows</a:t>
             </a:r>
           </a:p>
           <a:p>
@@ -26811,7 +26811,7 @@
                   <a:srgbClr val="212121"/>
                 </a:solidFill>
               </a:rPr>
-              <a:t>Developed by DITI Research and Teaching Fellows</a:t>
+              <a:t>Developed by Sean Rogers, DITI Research and Teaching Fellows</a:t>
             </a:r>
           </a:p>
           <a:p>

--- a/coding_quantitative/fa26-prina-econ3291-excel_r/FA26-Prina-ECON3291-Excel-or-R-Guide.pptx
+++ b/coding_quantitative/fa26-prina-econ3291-excel_r/FA26-Prina-ECON3291-Excel-or-R-Guide.pptx
@@ -15522,7 +15522,7 @@
                   <a:srgbClr val="37474F"/>
                 </a:solidFill>
               </a:rPr>
-              <a:t>Taught by Sean Rogers  ·  DITI Research and Teaching Fellows</a:t>
+              <a:t>Taught by Sean P. Rogers  ·  DITI Research and Teaching Fellows</a:t>
             </a:r>
           </a:p>
           <a:p>
@@ -26811,7 +26811,7 @@
                   <a:srgbClr val="212121"/>
                 </a:solidFill>
               </a:rPr>
-              <a:t>Developed by Sean Rogers, DITI Research and Teaching Fellows</a:t>
+              <a:t>Developed by Sean P. Rogers, DITI Research and Teaching Fellows</a:t>
             </a:r>
           </a:p>
           <a:p>
